--- a/Docs/other/Slideshow.pptx
+++ b/Docs/other/Slideshow.pptx
@@ -10,12 +10,15 @@
     <p:sldId id="258" r:id="rId4"/>
     <p:sldId id="259" r:id="rId5"/>
     <p:sldId id="260" r:id="rId6"/>
-    <p:sldId id="261" r:id="rId7"/>
-    <p:sldId id="263" r:id="rId8"/>
-    <p:sldId id="262" r:id="rId9"/>
-    <p:sldId id="270" r:id="rId10"/>
-    <p:sldId id="268" r:id="rId11"/>
-    <p:sldId id="269" r:id="rId12"/>
+    <p:sldId id="271" r:id="rId7"/>
+    <p:sldId id="272" r:id="rId8"/>
+    <p:sldId id="261" r:id="rId9"/>
+    <p:sldId id="263" r:id="rId10"/>
+    <p:sldId id="262" r:id="rId11"/>
+    <p:sldId id="273" r:id="rId12"/>
+    <p:sldId id="270" r:id="rId13"/>
+    <p:sldId id="268" r:id="rId14"/>
+    <p:sldId id="269" r:id="rId15"/>
   </p:sldIdLst>
   <p:sldSz cx="12192000" cy="6858000"/>
   <p:notesSz cx="6858000" cy="9144000"/>
@@ -292,7 +295,7 @@
           <a:p>
             <a:fld id="{15A75DD6-0524-4343-93DA-766D4132C164}" type="datetimeFigureOut">
               <a:rPr lang="en-US" smtClean="0"/>
-              <a:t>3/2/2026</a:t>
+              <a:t>3/3/2026</a:t>
             </a:fld>
             <a:endParaRPr lang="en-US"/>
           </a:p>
@@ -559,7 +562,7 @@
           <a:p>
             <a:fld id="{15A75DD6-0524-4343-93DA-766D4132C164}" type="datetimeFigureOut">
               <a:rPr lang="en-US" smtClean="0"/>
-              <a:t>3/2/2026</a:t>
+              <a:t>3/3/2026</a:t>
             </a:fld>
             <a:endParaRPr lang="en-US"/>
           </a:p>
@@ -790,7 +793,7 @@
           <a:p>
             <a:fld id="{15A75DD6-0524-4343-93DA-766D4132C164}" type="datetimeFigureOut">
               <a:rPr lang="en-US" smtClean="0"/>
-              <a:t>3/2/2026</a:t>
+              <a:t>3/3/2026</a:t>
             </a:fld>
             <a:endParaRPr lang="en-US"/>
           </a:p>
@@ -1100,7 +1103,7 @@
           <a:p>
             <a:fld id="{15A75DD6-0524-4343-93DA-766D4132C164}" type="datetimeFigureOut">
               <a:rPr lang="en-US" smtClean="0"/>
-              <a:t>3/2/2026</a:t>
+              <a:t>3/3/2026</a:t>
             </a:fld>
             <a:endParaRPr lang="en-US"/>
           </a:p>
@@ -1573,7 +1576,7 @@
           <a:p>
             <a:fld id="{15A75DD6-0524-4343-93DA-766D4132C164}" type="datetimeFigureOut">
               <a:rPr lang="en-US" smtClean="0"/>
-              <a:t>3/2/2026</a:t>
+              <a:t>3/3/2026</a:t>
             </a:fld>
             <a:endParaRPr lang="en-US"/>
           </a:p>
@@ -2120,7 +2123,7 @@
           <a:p>
             <a:fld id="{15A75DD6-0524-4343-93DA-766D4132C164}" type="datetimeFigureOut">
               <a:rPr lang="en-US" smtClean="0"/>
-              <a:t>3/2/2026</a:t>
+              <a:t>3/3/2026</a:t>
             </a:fld>
             <a:endParaRPr lang="en-US"/>
           </a:p>
@@ -2894,7 +2897,7 @@
           <a:p>
             <a:fld id="{15A75DD6-0524-4343-93DA-766D4132C164}" type="datetimeFigureOut">
               <a:rPr lang="en-US" smtClean="0"/>
-              <a:t>3/2/2026</a:t>
+              <a:t>3/3/2026</a:t>
             </a:fld>
             <a:endParaRPr lang="en-US"/>
           </a:p>
@@ -3069,7 +3072,7 @@
           <a:p>
             <a:fld id="{15A75DD6-0524-4343-93DA-766D4132C164}" type="datetimeFigureOut">
               <a:rPr lang="en-US" smtClean="0"/>
-              <a:t>3/2/2026</a:t>
+              <a:t>3/3/2026</a:t>
             </a:fld>
             <a:endParaRPr lang="en-US"/>
           </a:p>
@@ -3292,7 +3295,7 @@
           <a:p>
             <a:fld id="{15A75DD6-0524-4343-93DA-766D4132C164}" type="datetimeFigureOut">
               <a:rPr lang="en-US" smtClean="0"/>
-              <a:t>3/2/2026</a:t>
+              <a:t>3/3/2026</a:t>
             </a:fld>
             <a:endParaRPr lang="en-US"/>
           </a:p>
@@ -3472,7 +3475,7 @@
           <a:p>
             <a:fld id="{15A75DD6-0524-4343-93DA-766D4132C164}" type="datetimeFigureOut">
               <a:rPr lang="en-US" smtClean="0"/>
-              <a:t>3/2/2026</a:t>
+              <a:t>3/3/2026</a:t>
             </a:fld>
             <a:endParaRPr lang="en-US"/>
           </a:p>
@@ -3761,7 +3764,7 @@
           <a:p>
             <a:fld id="{15A75DD6-0524-4343-93DA-766D4132C164}" type="datetimeFigureOut">
               <a:rPr lang="en-US" smtClean="0"/>
-              <a:t>3/2/2026</a:t>
+              <a:t>3/3/2026</a:t>
             </a:fld>
             <a:endParaRPr lang="en-US"/>
           </a:p>
@@ -4003,7 +4006,7 @@
           <a:p>
             <a:fld id="{15A75DD6-0524-4343-93DA-766D4132C164}" type="datetimeFigureOut">
               <a:rPr lang="en-US" smtClean="0"/>
-              <a:t>3/2/2026</a:t>
+              <a:t>3/3/2026</a:t>
             </a:fld>
             <a:endParaRPr lang="en-US"/>
           </a:p>
@@ -4382,7 +4385,7 @@
           <a:p>
             <a:fld id="{15A75DD6-0524-4343-93DA-766D4132C164}" type="datetimeFigureOut">
               <a:rPr lang="en-US" smtClean="0"/>
-              <a:t>3/2/2026</a:t>
+              <a:t>3/3/2026</a:t>
             </a:fld>
             <a:endParaRPr lang="en-US"/>
           </a:p>
@@ -4500,7 +4503,7 @@
           <a:p>
             <a:fld id="{15A75DD6-0524-4343-93DA-766D4132C164}" type="datetimeFigureOut">
               <a:rPr lang="en-US" smtClean="0"/>
-              <a:t>3/2/2026</a:t>
+              <a:t>3/3/2026</a:t>
             </a:fld>
             <a:endParaRPr lang="en-US"/>
           </a:p>
@@ -4595,7 +4598,7 @@
           <a:p>
             <a:fld id="{15A75DD6-0524-4343-93DA-766D4132C164}" type="datetimeFigureOut">
               <a:rPr lang="en-US" smtClean="0"/>
-              <a:t>3/2/2026</a:t>
+              <a:t>3/3/2026</a:t>
             </a:fld>
             <a:endParaRPr lang="en-US"/>
           </a:p>
@@ -4844,7 +4847,7 @@
           <a:p>
             <a:fld id="{15A75DD6-0524-4343-93DA-766D4132C164}" type="datetimeFigureOut">
               <a:rPr lang="en-US" smtClean="0"/>
-              <a:t>3/2/2026</a:t>
+              <a:t>3/3/2026</a:t>
             </a:fld>
             <a:endParaRPr lang="en-US"/>
           </a:p>
@@ -5101,7 +5104,7 @@
           <a:p>
             <a:fld id="{15A75DD6-0524-4343-93DA-766D4132C164}" type="datetimeFigureOut">
               <a:rPr lang="en-US" smtClean="0"/>
-              <a:t>3/2/2026</a:t>
+              <a:t>3/3/2026</a:t>
             </a:fld>
             <a:endParaRPr lang="en-US"/>
           </a:p>
@@ -5344,7 +5347,7 @@
           <a:p>
             <a:fld id="{15A75DD6-0524-4343-93DA-766D4132C164}" type="datetimeFigureOut">
               <a:rPr lang="en-US" smtClean="0"/>
-              <a:t>3/2/2026</a:t>
+              <a:t>3/3/2026</a:t>
             </a:fld>
             <a:endParaRPr lang="en-US"/>
           </a:p>
@@ -5846,6 +5849,291 @@
           <p:cNvPr id="2" name="Title 1">
             <a:extLst>
               <a:ext uri="{FF2B5EF4-FFF2-40B4-BE49-F238E27FC236}">
+                <a16:creationId xmlns:a16="http://schemas.microsoft.com/office/drawing/2014/main" id="{F68584B1-6F78-75A4-41F0-673E03CBB772}"/>
+              </a:ext>
+            </a:extLst>
+          </p:cNvPr>
+          <p:cNvSpPr>
+            <a:spLocks noGrp="1"/>
+          </p:cNvSpPr>
+          <p:nvPr>
+            <p:ph type="title"/>
+          </p:nvPr>
+        </p:nvSpPr>
+        <p:spPr/>
+        <p:txBody>
+          <a:bodyPr/>
+          <a:lstStyle/>
+          <a:p>
+            <a:r>
+              <a:rPr lang="en-US" dirty="0"/>
+              <a:t>What Went Right</a:t>
+            </a:r>
+          </a:p>
+        </p:txBody>
+      </p:sp>
+      <p:sp>
+        <p:nvSpPr>
+          <p:cNvPr id="3" name="Content Placeholder 2">
+            <a:extLst>
+              <a:ext uri="{FF2B5EF4-FFF2-40B4-BE49-F238E27FC236}">
+                <a16:creationId xmlns:a16="http://schemas.microsoft.com/office/drawing/2014/main" id="{2F09D20D-060B-2971-B5E0-D659B825EE04}"/>
+              </a:ext>
+            </a:extLst>
+          </p:cNvPr>
+          <p:cNvSpPr>
+            <a:spLocks noGrp="1"/>
+          </p:cNvSpPr>
+          <p:nvPr>
+            <p:ph idx="1"/>
+          </p:nvPr>
+        </p:nvSpPr>
+        <p:spPr/>
+        <p:txBody>
+          <a:bodyPr/>
+          <a:lstStyle/>
+          <a:p>
+            <a:r>
+              <a:rPr lang="en-US" dirty="0"/>
+              <a:t>DNS setup</a:t>
+            </a:r>
+          </a:p>
+          <a:p>
+            <a:r>
+              <a:rPr lang="en-US" dirty="0"/>
+              <a:t>Domain Services configuration</a:t>
+            </a:r>
+          </a:p>
+          <a:p>
+            <a:r>
+              <a:rPr lang="en-US" dirty="0"/>
+              <a:t>System-wide updates</a:t>
+            </a:r>
+          </a:p>
+          <a:p>
+            <a:r>
+              <a:rPr lang="en-US" dirty="0"/>
+              <a:t>Installation of all softwares</a:t>
+            </a:r>
+          </a:p>
+          <a:p>
+            <a:r>
+              <a:rPr lang="en-US" dirty="0"/>
+              <a:t>Website creation</a:t>
+            </a:r>
+          </a:p>
+          <a:p>
+            <a:r>
+              <a:rPr lang="en-US" dirty="0"/>
+              <a:t>Attack server execution</a:t>
+            </a:r>
+          </a:p>
+          <a:p>
+            <a:endParaRPr lang="en-US" dirty="0"/>
+          </a:p>
+        </p:txBody>
+      </p:sp>
+    </p:spTree>
+    <p:extLst>
+      <p:ext uri="{BB962C8B-B14F-4D97-AF65-F5344CB8AC3E}">
+        <p14:creationId xmlns:p14="http://schemas.microsoft.com/office/powerpoint/2010/main" val="3070985149"/>
+      </p:ext>
+    </p:extLst>
+  </p:cSld>
+  <p:clrMapOvr>
+    <a:masterClrMapping/>
+  </p:clrMapOvr>
+</p:sld>
+</file>
+
+<file path=ppt/slides/slide11.xml><?xml version="1.0" encoding="utf-8"?>
+<p:sld xmlns:a="http://schemas.openxmlformats.org/drawingml/2006/main" xmlns:r="http://schemas.openxmlformats.org/officeDocument/2006/relationships" xmlns:p="http://schemas.openxmlformats.org/presentationml/2006/main">
+  <p:cSld>
+    <p:spTree>
+      <p:nvGrpSpPr>
+        <p:cNvPr id="1" name=""/>
+        <p:cNvGrpSpPr/>
+        <p:nvPr/>
+      </p:nvGrpSpPr>
+      <p:grpSpPr>
+        <a:xfrm>
+          <a:off x="0" y="0"/>
+          <a:ext cx="0" cy="0"/>
+          <a:chOff x="0" y="0"/>
+          <a:chExt cx="0" cy="0"/>
+        </a:xfrm>
+      </p:grpSpPr>
+      <p:sp>
+        <p:nvSpPr>
+          <p:cNvPr id="2" name="Title 1">
+            <a:extLst>
+              <a:ext uri="{FF2B5EF4-FFF2-40B4-BE49-F238E27FC236}">
+                <a16:creationId xmlns:a16="http://schemas.microsoft.com/office/drawing/2014/main" id="{2BAA3377-44C0-9527-A06B-EECA35CA28A0}"/>
+              </a:ext>
+            </a:extLst>
+          </p:cNvPr>
+          <p:cNvSpPr>
+            <a:spLocks noGrp="1"/>
+          </p:cNvSpPr>
+          <p:nvPr>
+            <p:ph type="title"/>
+          </p:nvPr>
+        </p:nvSpPr>
+        <p:spPr/>
+        <p:txBody>
+          <a:bodyPr/>
+          <a:lstStyle/>
+          <a:p>
+            <a:r>
+              <a:rPr lang="en-US" dirty="0"/>
+              <a:t>penetration testing results</a:t>
+            </a:r>
+          </a:p>
+        </p:txBody>
+      </p:sp>
+      <p:sp>
+        <p:nvSpPr>
+          <p:cNvPr id="3" name="Content Placeholder 2">
+            <a:extLst>
+              <a:ext uri="{FF2B5EF4-FFF2-40B4-BE49-F238E27FC236}">
+                <a16:creationId xmlns:a16="http://schemas.microsoft.com/office/drawing/2014/main" id="{9641DC9D-DC18-C587-EC65-5F0BAC6D34B3}"/>
+              </a:ext>
+            </a:extLst>
+          </p:cNvPr>
+          <p:cNvSpPr>
+            <a:spLocks noGrp="1"/>
+          </p:cNvSpPr>
+          <p:nvPr>
+            <p:ph idx="1"/>
+          </p:nvPr>
+        </p:nvSpPr>
+        <p:spPr/>
+        <p:txBody>
+          <a:bodyPr/>
+          <a:lstStyle/>
+          <a:p>
+            <a:endParaRPr lang="en-US" dirty="0"/>
+          </a:p>
+        </p:txBody>
+      </p:sp>
+    </p:spTree>
+    <p:extLst>
+      <p:ext uri="{BB962C8B-B14F-4D97-AF65-F5344CB8AC3E}">
+        <p14:creationId xmlns:p14="http://schemas.microsoft.com/office/powerpoint/2010/main" val="808702937"/>
+      </p:ext>
+    </p:extLst>
+  </p:cSld>
+  <p:clrMapOvr>
+    <a:masterClrMapping/>
+  </p:clrMapOvr>
+</p:sld>
+</file>
+
+<file path=ppt/slides/slide12.xml><?xml version="1.0" encoding="utf-8"?>
+<p:sld xmlns:a="http://schemas.openxmlformats.org/drawingml/2006/main" xmlns:r="http://schemas.openxmlformats.org/officeDocument/2006/relationships" xmlns:p="http://schemas.openxmlformats.org/presentationml/2006/main">
+  <p:cSld>
+    <p:spTree>
+      <p:nvGrpSpPr>
+        <p:cNvPr id="1" name=""/>
+        <p:cNvGrpSpPr/>
+        <p:nvPr/>
+      </p:nvGrpSpPr>
+      <p:grpSpPr>
+        <a:xfrm>
+          <a:off x="0" y="0"/>
+          <a:ext cx="0" cy="0"/>
+          <a:chOff x="0" y="0"/>
+          <a:chExt cx="0" cy="0"/>
+        </a:xfrm>
+      </p:grpSpPr>
+      <p:sp>
+        <p:nvSpPr>
+          <p:cNvPr id="2" name="Title 1">
+            <a:extLst>
+              <a:ext uri="{FF2B5EF4-FFF2-40B4-BE49-F238E27FC236}">
+                <a16:creationId xmlns:a16="http://schemas.microsoft.com/office/drawing/2014/main" id="{9C92994D-4F72-39E0-8B02-531CEEBF6D6F}"/>
+              </a:ext>
+            </a:extLst>
+          </p:cNvPr>
+          <p:cNvSpPr>
+            <a:spLocks noGrp="1"/>
+          </p:cNvSpPr>
+          <p:nvPr>
+            <p:ph type="title"/>
+          </p:nvPr>
+        </p:nvSpPr>
+        <p:spPr/>
+        <p:txBody>
+          <a:bodyPr/>
+          <a:lstStyle/>
+          <a:p>
+            <a:r>
+              <a:rPr lang="en-US" dirty="0"/>
+              <a:t>Conclusion </a:t>
+            </a:r>
+          </a:p>
+        </p:txBody>
+      </p:sp>
+      <p:sp>
+        <p:nvSpPr>
+          <p:cNvPr id="3" name="Content Placeholder 2">
+            <a:extLst>
+              <a:ext uri="{FF2B5EF4-FFF2-40B4-BE49-F238E27FC236}">
+                <a16:creationId xmlns:a16="http://schemas.microsoft.com/office/drawing/2014/main" id="{CC689881-CDA1-E92B-6922-301AC943BA66}"/>
+              </a:ext>
+            </a:extLst>
+          </p:cNvPr>
+          <p:cNvSpPr>
+            <a:spLocks noGrp="1"/>
+          </p:cNvSpPr>
+          <p:nvPr>
+            <p:ph idx="1"/>
+          </p:nvPr>
+        </p:nvSpPr>
+        <p:spPr/>
+        <p:txBody>
+          <a:bodyPr/>
+          <a:lstStyle/>
+          <a:p>
+            <a:endParaRPr lang="en-US"/>
+          </a:p>
+        </p:txBody>
+      </p:sp>
+    </p:spTree>
+    <p:extLst>
+      <p:ext uri="{BB962C8B-B14F-4D97-AF65-F5344CB8AC3E}">
+        <p14:creationId xmlns:p14="http://schemas.microsoft.com/office/powerpoint/2010/main" val="693535514"/>
+      </p:ext>
+    </p:extLst>
+  </p:cSld>
+  <p:clrMapOvr>
+    <a:masterClrMapping/>
+  </p:clrMapOvr>
+</p:sld>
+</file>
+
+<file path=ppt/slides/slide13.xml><?xml version="1.0" encoding="utf-8"?>
+<p:sld xmlns:a="http://schemas.openxmlformats.org/drawingml/2006/main" xmlns:r="http://schemas.openxmlformats.org/officeDocument/2006/relationships" xmlns:p="http://schemas.openxmlformats.org/presentationml/2006/main">
+  <p:cSld>
+    <p:spTree>
+      <p:nvGrpSpPr>
+        <p:cNvPr id="1" name=""/>
+        <p:cNvGrpSpPr/>
+        <p:nvPr/>
+      </p:nvGrpSpPr>
+      <p:grpSpPr>
+        <a:xfrm>
+          <a:off x="0" y="0"/>
+          <a:ext cx="0" cy="0"/>
+          <a:chOff x="0" y="0"/>
+          <a:chExt cx="0" cy="0"/>
+        </a:xfrm>
+      </p:grpSpPr>
+      <p:sp>
+        <p:nvSpPr>
+          <p:cNvPr id="2" name="Title 1">
+            <a:extLst>
+              <a:ext uri="{FF2B5EF4-FFF2-40B4-BE49-F238E27FC236}">
                 <a16:creationId xmlns:a16="http://schemas.microsoft.com/office/drawing/2014/main" id="{A7F02B1F-C788-DC75-F422-019765438241}"/>
               </a:ext>
             </a:extLst>
@@ -5854,7 +6142,7 @@
             <a:spLocks noGrp="1"/>
           </p:cNvSpPr>
           <p:nvPr>
-            <p:ph type="title"/>
+            <p:ph type="ctrTitle"/>
           </p:nvPr>
         </p:nvSpPr>
         <p:spPr/>
@@ -5871,10 +6159,10 @@
       </p:sp>
       <p:sp>
         <p:nvSpPr>
-          <p:cNvPr id="3" name="Content Placeholder 2">
+          <p:cNvPr id="5" name="Subtitle 4">
             <a:extLst>
               <a:ext uri="{FF2B5EF4-FFF2-40B4-BE49-F238E27FC236}">
-                <a16:creationId xmlns:a16="http://schemas.microsoft.com/office/drawing/2014/main" id="{156450FD-2961-6890-992A-860633C3180B}"/>
+                <a16:creationId xmlns:a16="http://schemas.microsoft.com/office/drawing/2014/main" id="{557FCDC1-7675-3AF5-937B-BF6FF9F0EAB9}"/>
               </a:ext>
             </a:extLst>
           </p:cNvPr>
@@ -5882,7 +6170,7 @@
             <a:spLocks noGrp="1"/>
           </p:cNvSpPr>
           <p:nvPr>
-            <p:ph idx="1"/>
+            <p:ph type="subTitle" idx="1"/>
           </p:nvPr>
         </p:nvSpPr>
         <p:spPr/>
@@ -5890,7 +6178,7 @@
           <a:bodyPr/>
           <a:lstStyle/>
           <a:p>
-            <a:endParaRPr lang="en-US" dirty="0"/>
+            <a:endParaRPr lang="en-US"/>
           </a:p>
         </p:txBody>
       </p:sp>
@@ -5907,7 +6195,7 @@
 </p:sld>
 </file>
 
-<file path=ppt/slides/slide11.xml><?xml version="1.0" encoding="utf-8"?>
+<file path=ppt/slides/slide14.xml><?xml version="1.0" encoding="utf-8"?>
 <p:sld xmlns:a="http://schemas.openxmlformats.org/drawingml/2006/main" xmlns:r="http://schemas.openxmlformats.org/officeDocument/2006/relationships" xmlns:p="http://schemas.openxmlformats.org/presentationml/2006/main">
   <p:cSld>
     <p:spTree>
@@ -6139,7 +6427,35 @@
           <a:bodyPr/>
           <a:lstStyle/>
           <a:p>
-            <a:endParaRPr lang="en-US"/>
+            <a:r>
+              <a:rPr lang="en-US" dirty="0"/>
+              <a:t>I wanted to learn more about cybersecurity</a:t>
+            </a:r>
+          </a:p>
+          <a:p>
+            <a:r>
+              <a:rPr lang="en-US" dirty="0"/>
+              <a:t>I wanted to design my own network</a:t>
+            </a:r>
+          </a:p>
+          <a:p>
+            <a:r>
+              <a:rPr lang="en-US" dirty="0"/>
+              <a:t>I wanted to understand the shortcomings of the configuration</a:t>
+            </a:r>
+          </a:p>
+          <a:p>
+            <a:r>
+              <a:rPr lang="en-US" dirty="0"/>
+              <a:t>Most of all, I wanted to learn what I would miss</a:t>
+            </a:r>
+          </a:p>
+          <a:p>
+            <a:pPr lvl="1"/>
+            <a:r>
+              <a:rPr lang="en-US" dirty="0"/>
+              <a:t>So that I can improve</a:t>
+            </a:r>
           </a:p>
         </p:txBody>
       </p:sp>
@@ -6279,7 +6595,7 @@
           <a:p>
             <a:r>
               <a:rPr lang="en-US" dirty="0"/>
-              <a:t>Technologies Used</a:t>
+              <a:t>Technologies Used (Windows)</a:t>
             </a:r>
           </a:p>
         </p:txBody>
@@ -6302,10 +6618,45 @@
         </p:nvSpPr>
         <p:spPr/>
         <p:txBody>
-          <a:bodyPr/>
-          <a:lstStyle/>
-          <a:p>
-            <a:endParaRPr lang="en-US"/>
+          <a:bodyPr>
+            <a:normAutofit/>
+          </a:bodyPr>
+          <a:lstStyle/>
+          <a:p>
+            <a:r>
+              <a:rPr lang="en-US" dirty="0"/>
+              <a:t>Windows</a:t>
+            </a:r>
+          </a:p>
+          <a:p>
+            <a:r>
+              <a:rPr lang="en-US" dirty="0"/>
+              <a:t>Hyper-V</a:t>
+            </a:r>
+          </a:p>
+          <a:p>
+            <a:r>
+              <a:rPr lang="en-US" dirty="0"/>
+              <a:t>DNS</a:t>
+            </a:r>
+          </a:p>
+          <a:p>
+            <a:r>
+              <a:rPr lang="en-US" dirty="0"/>
+              <a:t>Domain Services</a:t>
+            </a:r>
+          </a:p>
+          <a:p>
+            <a:r>
+              <a:rPr lang="en-US" dirty="0"/>
+              <a:t>Nmap</a:t>
+            </a:r>
+          </a:p>
+          <a:p>
+            <a:r>
+              <a:rPr lang="en-US" dirty="0"/>
+              <a:t>Nessus </a:t>
+            </a:r>
           </a:p>
         </p:txBody>
       </p:sp>
@@ -6327,7 +6678,13 @@
   <p:cSld>
     <p:spTree>
       <p:nvGrpSpPr>
-        <p:cNvPr id="1" name=""/>
+        <p:cNvPr id="1" name="">
+          <a:extLst>
+            <a:ext uri="{FF2B5EF4-FFF2-40B4-BE49-F238E27FC236}">
+              <a16:creationId xmlns:a16="http://schemas.microsoft.com/office/drawing/2014/main" id="{B6D9C8E0-6874-2DC5-1D0A-D4AF2D4BC3EC}"/>
+            </a:ext>
+          </a:extLst>
+        </p:cNvPr>
         <p:cNvGrpSpPr/>
         <p:nvPr/>
       </p:nvGrpSpPr>
@@ -6344,7 +6701,7 @@
           <p:cNvPr id="2" name="Title 1">
             <a:extLst>
               <a:ext uri="{FF2B5EF4-FFF2-40B4-BE49-F238E27FC236}">
-                <a16:creationId xmlns:a16="http://schemas.microsoft.com/office/drawing/2014/main" id="{21407DC4-B8A5-8433-1E4A-81682D3A1E2D}"/>
+                <a16:creationId xmlns:a16="http://schemas.microsoft.com/office/drawing/2014/main" id="{A48B3819-D4AE-16E9-3091-E88EFF051C92}"/>
               </a:ext>
             </a:extLst>
           </p:cNvPr>
@@ -6362,7 +6719,7 @@
           <a:p>
             <a:r>
               <a:rPr lang="en-US" dirty="0"/>
-              <a:t>What Went wrong</a:t>
+              <a:t>Technologies Used (Linux)</a:t>
             </a:r>
           </a:p>
         </p:txBody>
@@ -6372,7 +6729,7 @@
           <p:cNvPr id="3" name="Content Placeholder 2">
             <a:extLst>
               <a:ext uri="{FF2B5EF4-FFF2-40B4-BE49-F238E27FC236}">
-                <a16:creationId xmlns:a16="http://schemas.microsoft.com/office/drawing/2014/main" id="{E98DB40A-EB1A-370A-8DC5-C75E459D6B7E}"/>
+                <a16:creationId xmlns:a16="http://schemas.microsoft.com/office/drawing/2014/main" id="{1DB13F45-53C9-C84A-0265-8E03A264E358}"/>
               </a:ext>
             </a:extLst>
           </p:cNvPr>
@@ -6385,17 +6742,68 @@
         </p:nvSpPr>
         <p:spPr/>
         <p:txBody>
-          <a:bodyPr/>
-          <a:lstStyle/>
-          <a:p>
-            <a:endParaRPr lang="en-US"/>
+          <a:bodyPr>
+            <a:normAutofit/>
+          </a:bodyPr>
+          <a:lstStyle/>
+          <a:p>
+            <a:r>
+              <a:rPr lang="en-US" dirty="0"/>
+              <a:t>Ubuntu</a:t>
+            </a:r>
+          </a:p>
+          <a:p>
+            <a:r>
+              <a:rPr lang="en-US" dirty="0"/>
+              <a:t>MongoDB</a:t>
+            </a:r>
+          </a:p>
+          <a:p>
+            <a:r>
+              <a:rPr lang="en-US" dirty="0"/>
+              <a:t>node.js</a:t>
+            </a:r>
+          </a:p>
+          <a:p>
+            <a:r>
+              <a:rPr lang="en-US" dirty="0"/>
+              <a:t>nginx</a:t>
+            </a:r>
+          </a:p>
+          <a:p>
+            <a:r>
+              <a:rPr lang="en-US" dirty="0"/>
+              <a:t>pm2</a:t>
+            </a:r>
+          </a:p>
+          <a:p>
+            <a:r>
+              <a:rPr lang="en-US" dirty="0"/>
+              <a:t>Nmap</a:t>
+            </a:r>
+          </a:p>
+          <a:p>
+            <a:r>
+              <a:rPr lang="en-US" dirty="0" err="1"/>
+              <a:t>CrackMapExec</a:t>
+            </a:r>
+            <a:endParaRPr lang="en-US" dirty="0"/>
+          </a:p>
+          <a:p>
+            <a:pPr marL="0" indent="0">
+              <a:buNone/>
+            </a:pPr>
+            <a:endParaRPr lang="en-US" dirty="0"/>
+          </a:p>
+          <a:p>
+            <a:endParaRPr lang="en-US" dirty="0"/>
           </a:p>
         </p:txBody>
       </p:sp>
     </p:spTree>
     <p:extLst>
       <p:ext uri="{BB962C8B-B14F-4D97-AF65-F5344CB8AC3E}">
-        <p14:creationId xmlns:p14="http://schemas.microsoft.com/office/powerpoint/2010/main" val="2627753540"/>
+        <p14:creationId xmlns:p14="http://schemas.microsoft.com/office/powerpoint/2010/main" val="3457196227"/>
       </p:ext>
     </p:extLst>
   </p:cSld>
@@ -6410,7 +6818,13 @@
   <p:cSld>
     <p:spTree>
       <p:nvGrpSpPr>
-        <p:cNvPr id="1" name=""/>
+        <p:cNvPr id="1" name="">
+          <a:extLst>
+            <a:ext uri="{FF2B5EF4-FFF2-40B4-BE49-F238E27FC236}">
+              <a16:creationId xmlns:a16="http://schemas.microsoft.com/office/drawing/2014/main" id="{24419F41-FC86-22F3-BE88-4569C9CF801E}"/>
+            </a:ext>
+          </a:extLst>
+        </p:cNvPr>
         <p:cNvGrpSpPr/>
         <p:nvPr/>
       </p:nvGrpSpPr>
@@ -6427,7 +6841,7 @@
           <p:cNvPr id="2" name="Title 1">
             <a:extLst>
               <a:ext uri="{FF2B5EF4-FFF2-40B4-BE49-F238E27FC236}">
-                <a16:creationId xmlns:a16="http://schemas.microsoft.com/office/drawing/2014/main" id="{4C90295D-E491-9480-F617-1C5EFF01BEDC}"/>
+                <a16:creationId xmlns:a16="http://schemas.microsoft.com/office/drawing/2014/main" id="{69E9339B-91B7-0D20-4CDE-8D9E667B279E}"/>
               </a:ext>
             </a:extLst>
           </p:cNvPr>
@@ -6445,7 +6859,7 @@
           <a:p>
             <a:r>
               <a:rPr lang="en-US" dirty="0"/>
-              <a:t>How I fixed it</a:t>
+              <a:t>Technologies Used (Firewall)</a:t>
             </a:r>
           </a:p>
         </p:txBody>
@@ -6455,7 +6869,7 @@
           <p:cNvPr id="3" name="Content Placeholder 2">
             <a:extLst>
               <a:ext uri="{FF2B5EF4-FFF2-40B4-BE49-F238E27FC236}">
-                <a16:creationId xmlns:a16="http://schemas.microsoft.com/office/drawing/2014/main" id="{7DD4DB23-9516-B80C-8C2C-FABFEA75993A}"/>
+                <a16:creationId xmlns:a16="http://schemas.microsoft.com/office/drawing/2014/main" id="{0DADC579-14D6-4E30-24C5-F220F2B171ED}"/>
               </a:ext>
             </a:extLst>
           </p:cNvPr>
@@ -6468,17 +6882,22 @@
         </p:nvSpPr>
         <p:spPr/>
         <p:txBody>
-          <a:bodyPr/>
-          <a:lstStyle/>
-          <a:p>
-            <a:endParaRPr lang="en-US"/>
+          <a:bodyPr>
+            <a:normAutofit/>
+          </a:bodyPr>
+          <a:lstStyle/>
+          <a:p>
+            <a:r>
+              <a:rPr lang="en-US" dirty="0"/>
+              <a:t>OPNsense</a:t>
+            </a:r>
           </a:p>
         </p:txBody>
       </p:sp>
     </p:spTree>
     <p:extLst>
       <p:ext uri="{BB962C8B-B14F-4D97-AF65-F5344CB8AC3E}">
-        <p14:creationId xmlns:p14="http://schemas.microsoft.com/office/powerpoint/2010/main" val="12790232"/>
+        <p14:creationId xmlns:p14="http://schemas.microsoft.com/office/powerpoint/2010/main" val="1790785502"/>
       </p:ext>
     </p:extLst>
   </p:cSld>
@@ -6510,7 +6929,7 @@
           <p:cNvPr id="2" name="Title 1">
             <a:extLst>
               <a:ext uri="{FF2B5EF4-FFF2-40B4-BE49-F238E27FC236}">
-                <a16:creationId xmlns:a16="http://schemas.microsoft.com/office/drawing/2014/main" id="{F68584B1-6F78-75A4-41F0-673E03CBB772}"/>
+                <a16:creationId xmlns:a16="http://schemas.microsoft.com/office/drawing/2014/main" id="{21407DC4-B8A5-8433-1E4A-81682D3A1E2D}"/>
               </a:ext>
             </a:extLst>
           </p:cNvPr>
@@ -6528,7 +6947,7 @@
           <a:p>
             <a:r>
               <a:rPr lang="en-US" dirty="0"/>
-              <a:t>What Went Right</a:t>
+              <a:t>What Went wrong</a:t>
             </a:r>
           </a:p>
         </p:txBody>
@@ -6538,7 +6957,7 @@
           <p:cNvPr id="3" name="Content Placeholder 2">
             <a:extLst>
               <a:ext uri="{FF2B5EF4-FFF2-40B4-BE49-F238E27FC236}">
-                <a16:creationId xmlns:a16="http://schemas.microsoft.com/office/drawing/2014/main" id="{2F09D20D-060B-2971-B5E0-D659B825EE04}"/>
+                <a16:creationId xmlns:a16="http://schemas.microsoft.com/office/drawing/2014/main" id="{E98DB40A-EB1A-370A-8DC5-C75E459D6B7E}"/>
               </a:ext>
             </a:extLst>
           </p:cNvPr>
@@ -6554,14 +6973,47 @@
           <a:bodyPr/>
           <a:lstStyle/>
           <a:p>
-            <a:endParaRPr lang="en-US"/>
+            <a:r>
+              <a:rPr lang="en-US" dirty="0"/>
+              <a:t>Blade connection issue</a:t>
+            </a:r>
+          </a:p>
+          <a:p>
+            <a:r>
+              <a:rPr lang="en-US" dirty="0"/>
+              <a:t>Network Firewall routing issues</a:t>
+            </a:r>
+          </a:p>
+          <a:p>
+            <a:r>
+              <a:rPr lang="en-US" dirty="0"/>
+              <a:t>Database authentication issue</a:t>
+            </a:r>
+          </a:p>
+          <a:p>
+            <a:endParaRPr lang="en-US" dirty="0"/>
+          </a:p>
+          <a:p>
+            <a:r>
+              <a:rPr lang="en-US" dirty="0"/>
+              <a:t>Server room connection issue</a:t>
+            </a:r>
+          </a:p>
+          <a:p>
+            <a:r>
+              <a:rPr lang="en-US" dirty="0"/>
+              <a:t>Synology failure</a:t>
+            </a:r>
+          </a:p>
+          <a:p>
+            <a:endParaRPr lang="en-US" dirty="0"/>
           </a:p>
         </p:txBody>
       </p:sp>
     </p:spTree>
     <p:extLst>
       <p:ext uri="{BB962C8B-B14F-4D97-AF65-F5344CB8AC3E}">
-        <p14:creationId xmlns:p14="http://schemas.microsoft.com/office/powerpoint/2010/main" val="3070985149"/>
+        <p14:creationId xmlns:p14="http://schemas.microsoft.com/office/powerpoint/2010/main" val="2627753540"/>
       </p:ext>
     </p:extLst>
   </p:cSld>
@@ -6593,7 +7045,7 @@
           <p:cNvPr id="2" name="Title 1">
             <a:extLst>
               <a:ext uri="{FF2B5EF4-FFF2-40B4-BE49-F238E27FC236}">
-                <a16:creationId xmlns:a16="http://schemas.microsoft.com/office/drawing/2014/main" id="{9C92994D-4F72-39E0-8B02-531CEEBF6D6F}"/>
+                <a16:creationId xmlns:a16="http://schemas.microsoft.com/office/drawing/2014/main" id="{4C90295D-E491-9480-F617-1C5EFF01BEDC}"/>
               </a:ext>
             </a:extLst>
           </p:cNvPr>
@@ -6611,7 +7063,7 @@
           <a:p>
             <a:r>
               <a:rPr lang="en-US" dirty="0"/>
-              <a:t>Conclusion </a:t>
+              <a:t>How I fixed it</a:t>
             </a:r>
           </a:p>
         </p:txBody>
@@ -6621,7 +7073,7 @@
           <p:cNvPr id="3" name="Content Placeholder 2">
             <a:extLst>
               <a:ext uri="{FF2B5EF4-FFF2-40B4-BE49-F238E27FC236}">
-                <a16:creationId xmlns:a16="http://schemas.microsoft.com/office/drawing/2014/main" id="{CC689881-CDA1-E92B-6922-301AC943BA66}"/>
+                <a16:creationId xmlns:a16="http://schemas.microsoft.com/office/drawing/2014/main" id="{7DD4DB23-9516-B80C-8C2C-FABFEA75993A}"/>
               </a:ext>
             </a:extLst>
           </p:cNvPr>
@@ -6634,17 +7086,89 @@
         </p:nvSpPr>
         <p:spPr/>
         <p:txBody>
-          <a:bodyPr/>
-          <a:lstStyle/>
-          <a:p>
-            <a:endParaRPr lang="en-US"/>
+          <a:bodyPr>
+            <a:normAutofit lnSpcReduction="10000"/>
+          </a:bodyPr>
+          <a:lstStyle/>
+          <a:p>
+            <a:r>
+              <a:rPr lang="en-US" dirty="0"/>
+              <a:t>Blade connection issue</a:t>
+            </a:r>
+          </a:p>
+          <a:p>
+            <a:pPr lvl="1"/>
+            <a:r>
+              <a:rPr lang="en-US" b="1" dirty="0"/>
+              <a:t>I compacted down the one blade to remove the extra network</a:t>
+            </a:r>
+          </a:p>
+          <a:p>
+            <a:r>
+              <a:rPr lang="en-US" dirty="0"/>
+              <a:t>Network Firewall routing issues</a:t>
+            </a:r>
+          </a:p>
+          <a:p>
+            <a:pPr lvl="1"/>
+            <a:r>
+              <a:rPr lang="en-US" b="1" dirty="0"/>
+              <a:t>I removed the etcher firewall that was causing the routing and built up better protections</a:t>
+            </a:r>
+          </a:p>
+          <a:p>
+            <a:r>
+              <a:rPr lang="en-US" dirty="0"/>
+              <a:t>Database authentication issue</a:t>
+            </a:r>
+          </a:p>
+          <a:p>
+            <a:pPr lvl="1"/>
+            <a:r>
+              <a:rPr lang="en-US" b="1" dirty="0"/>
+              <a:t>I changed the password to a form that was allowed</a:t>
+            </a:r>
+            <a:endParaRPr lang="en-US" dirty="0"/>
+          </a:p>
+          <a:p>
+            <a:r>
+              <a:rPr lang="en-US" dirty="0"/>
+              <a:t>Server room connection issue</a:t>
+            </a:r>
+          </a:p>
+          <a:p>
+            <a:pPr lvl="1"/>
+            <a:r>
+              <a:rPr lang="en-US" b="1" dirty="0"/>
+              <a:t>I went to the server room physically and connected directly</a:t>
+            </a:r>
+          </a:p>
+          <a:p>
+            <a:r>
+              <a:rPr lang="en-US" dirty="0"/>
+              <a:t>Synology failure</a:t>
+            </a:r>
+          </a:p>
+          <a:p>
+            <a:pPr lvl="1"/>
+            <a:r>
+              <a:rPr lang="en-US" b="1" dirty="0"/>
+              <a:t>I rebuilt all VMs and configurations at minimal specs</a:t>
+            </a:r>
+          </a:p>
+          <a:p>
+            <a:pPr lvl="1"/>
+            <a:endParaRPr lang="en-US" dirty="0"/>
+          </a:p>
+          <a:p>
+            <a:endParaRPr lang="en-US" dirty="0"/>
           </a:p>
         </p:txBody>
       </p:sp>
     </p:spTree>
     <p:extLst>
       <p:ext uri="{BB962C8B-B14F-4D97-AF65-F5344CB8AC3E}">
-        <p14:creationId xmlns:p14="http://schemas.microsoft.com/office/powerpoint/2010/main" val="693535514"/>
+        <p14:creationId xmlns:p14="http://schemas.microsoft.com/office/powerpoint/2010/main" val="12790232"/>
       </p:ext>
     </p:extLst>
   </p:cSld>

--- a/Docs/other/Slideshow.pptx
+++ b/Docs/other/Slideshow.pptx
@@ -295,7 +295,7 @@
           <a:p>
             <a:fld id="{15A75DD6-0524-4343-93DA-766D4132C164}" type="datetimeFigureOut">
               <a:rPr lang="en-US" smtClean="0"/>
-              <a:t>3/3/2026</a:t>
+              <a:t>3/4/2026</a:t>
             </a:fld>
             <a:endParaRPr lang="en-US"/>
           </a:p>
@@ -562,7 +562,7 @@
           <a:p>
             <a:fld id="{15A75DD6-0524-4343-93DA-766D4132C164}" type="datetimeFigureOut">
               <a:rPr lang="en-US" smtClean="0"/>
-              <a:t>3/3/2026</a:t>
+              <a:t>3/4/2026</a:t>
             </a:fld>
             <a:endParaRPr lang="en-US"/>
           </a:p>
@@ -793,7 +793,7 @@
           <a:p>
             <a:fld id="{15A75DD6-0524-4343-93DA-766D4132C164}" type="datetimeFigureOut">
               <a:rPr lang="en-US" smtClean="0"/>
-              <a:t>3/3/2026</a:t>
+              <a:t>3/4/2026</a:t>
             </a:fld>
             <a:endParaRPr lang="en-US"/>
           </a:p>
@@ -1103,7 +1103,7 @@
           <a:p>
             <a:fld id="{15A75DD6-0524-4343-93DA-766D4132C164}" type="datetimeFigureOut">
               <a:rPr lang="en-US" smtClean="0"/>
-              <a:t>3/3/2026</a:t>
+              <a:t>3/4/2026</a:t>
             </a:fld>
             <a:endParaRPr lang="en-US"/>
           </a:p>
@@ -1576,7 +1576,7 @@
           <a:p>
             <a:fld id="{15A75DD6-0524-4343-93DA-766D4132C164}" type="datetimeFigureOut">
               <a:rPr lang="en-US" smtClean="0"/>
-              <a:t>3/3/2026</a:t>
+              <a:t>3/4/2026</a:t>
             </a:fld>
             <a:endParaRPr lang="en-US"/>
           </a:p>
@@ -2123,7 +2123,7 @@
           <a:p>
             <a:fld id="{15A75DD6-0524-4343-93DA-766D4132C164}" type="datetimeFigureOut">
               <a:rPr lang="en-US" smtClean="0"/>
-              <a:t>3/3/2026</a:t>
+              <a:t>3/4/2026</a:t>
             </a:fld>
             <a:endParaRPr lang="en-US"/>
           </a:p>
@@ -2897,7 +2897,7 @@
           <a:p>
             <a:fld id="{15A75DD6-0524-4343-93DA-766D4132C164}" type="datetimeFigureOut">
               <a:rPr lang="en-US" smtClean="0"/>
-              <a:t>3/3/2026</a:t>
+              <a:t>3/4/2026</a:t>
             </a:fld>
             <a:endParaRPr lang="en-US"/>
           </a:p>
@@ -3072,7 +3072,7 @@
           <a:p>
             <a:fld id="{15A75DD6-0524-4343-93DA-766D4132C164}" type="datetimeFigureOut">
               <a:rPr lang="en-US" smtClean="0"/>
-              <a:t>3/3/2026</a:t>
+              <a:t>3/4/2026</a:t>
             </a:fld>
             <a:endParaRPr lang="en-US"/>
           </a:p>
@@ -3295,7 +3295,7 @@
           <a:p>
             <a:fld id="{15A75DD6-0524-4343-93DA-766D4132C164}" type="datetimeFigureOut">
               <a:rPr lang="en-US" smtClean="0"/>
-              <a:t>3/3/2026</a:t>
+              <a:t>3/4/2026</a:t>
             </a:fld>
             <a:endParaRPr lang="en-US"/>
           </a:p>
@@ -3475,7 +3475,7 @@
           <a:p>
             <a:fld id="{15A75DD6-0524-4343-93DA-766D4132C164}" type="datetimeFigureOut">
               <a:rPr lang="en-US" smtClean="0"/>
-              <a:t>3/3/2026</a:t>
+              <a:t>3/4/2026</a:t>
             </a:fld>
             <a:endParaRPr lang="en-US"/>
           </a:p>
@@ -3764,7 +3764,7 @@
           <a:p>
             <a:fld id="{15A75DD6-0524-4343-93DA-766D4132C164}" type="datetimeFigureOut">
               <a:rPr lang="en-US" smtClean="0"/>
-              <a:t>3/3/2026</a:t>
+              <a:t>3/4/2026</a:t>
             </a:fld>
             <a:endParaRPr lang="en-US"/>
           </a:p>
@@ -4006,7 +4006,7 @@
           <a:p>
             <a:fld id="{15A75DD6-0524-4343-93DA-766D4132C164}" type="datetimeFigureOut">
               <a:rPr lang="en-US" smtClean="0"/>
-              <a:t>3/3/2026</a:t>
+              <a:t>3/4/2026</a:t>
             </a:fld>
             <a:endParaRPr lang="en-US"/>
           </a:p>
@@ -4385,7 +4385,7 @@
           <a:p>
             <a:fld id="{15A75DD6-0524-4343-93DA-766D4132C164}" type="datetimeFigureOut">
               <a:rPr lang="en-US" smtClean="0"/>
-              <a:t>3/3/2026</a:t>
+              <a:t>3/4/2026</a:t>
             </a:fld>
             <a:endParaRPr lang="en-US"/>
           </a:p>
@@ -4503,7 +4503,7 @@
           <a:p>
             <a:fld id="{15A75DD6-0524-4343-93DA-766D4132C164}" type="datetimeFigureOut">
               <a:rPr lang="en-US" smtClean="0"/>
-              <a:t>3/3/2026</a:t>
+              <a:t>3/4/2026</a:t>
             </a:fld>
             <a:endParaRPr lang="en-US"/>
           </a:p>
@@ -4598,7 +4598,7 @@
           <a:p>
             <a:fld id="{15A75DD6-0524-4343-93DA-766D4132C164}" type="datetimeFigureOut">
               <a:rPr lang="en-US" smtClean="0"/>
-              <a:t>3/3/2026</a:t>
+              <a:t>3/4/2026</a:t>
             </a:fld>
             <a:endParaRPr lang="en-US"/>
           </a:p>
@@ -4847,7 +4847,7 @@
           <a:p>
             <a:fld id="{15A75DD6-0524-4343-93DA-766D4132C164}" type="datetimeFigureOut">
               <a:rPr lang="en-US" smtClean="0"/>
-              <a:t>3/3/2026</a:t>
+              <a:t>3/4/2026</a:t>
             </a:fld>
             <a:endParaRPr lang="en-US"/>
           </a:p>
@@ -5104,7 +5104,7 @@
           <a:p>
             <a:fld id="{15A75DD6-0524-4343-93DA-766D4132C164}" type="datetimeFigureOut">
               <a:rPr lang="en-US" smtClean="0"/>
-              <a:t>3/3/2026</a:t>
+              <a:t>3/4/2026</a:t>
             </a:fld>
             <a:endParaRPr lang="en-US"/>
           </a:p>
@@ -5347,7 +5347,7 @@
           <a:p>
             <a:fld id="{15A75DD6-0524-4343-93DA-766D4132C164}" type="datetimeFigureOut">
               <a:rPr lang="en-US" smtClean="0"/>
-              <a:t>3/3/2026</a:t>
+              <a:t>3/4/2026</a:t>
             </a:fld>
             <a:endParaRPr lang="en-US"/>
           </a:p>
@@ -6517,31 +6517,44 @@
           </a:p>
         </p:txBody>
       </p:sp>
-      <p:sp>
-        <p:nvSpPr>
-          <p:cNvPr id="3" name="Content Placeholder 2">
+      <p:pic>
+        <p:nvPicPr>
+          <p:cNvPr id="5" name="Content Placeholder 4">
             <a:extLst>
               <a:ext uri="{FF2B5EF4-FFF2-40B4-BE49-F238E27FC236}">
-                <a16:creationId xmlns:a16="http://schemas.microsoft.com/office/drawing/2014/main" id="{C087400A-FAFB-525E-61E1-3CF80F2E9276}"/>
+                <a16:creationId xmlns:a16="http://schemas.microsoft.com/office/drawing/2014/main" id="{922BE73F-72D6-511E-5E0A-0CFE679752E3}"/>
               </a:ext>
             </a:extLst>
           </p:cNvPr>
-          <p:cNvSpPr>
-            <a:spLocks noGrp="1"/>
-          </p:cNvSpPr>
+          <p:cNvPicPr>
+            <a:picLocks noGrp="1" noChangeAspect="1"/>
+          </p:cNvPicPr>
           <p:nvPr>
             <p:ph idx="1"/>
           </p:nvPr>
-        </p:nvSpPr>
-        <p:spPr/>
-        <p:txBody>
-          <a:bodyPr/>
-          <a:lstStyle/>
-          <a:p>
-            <a:endParaRPr lang="en-US"/>
-          </a:p>
-        </p:txBody>
-      </p:sp>
+        </p:nvPicPr>
+        <p:blipFill>
+          <a:blip r:embed="rId2">
+            <a:extLst>
+              <a:ext uri="{28A0092B-C50C-407E-A947-70E740481C1C}">
+                <a14:useLocalDpi xmlns:a14="http://schemas.microsoft.com/office/drawing/2010/main" val="0"/>
+              </a:ext>
+            </a:extLst>
+          </a:blip>
+          <a:stretch>
+            <a:fillRect/>
+          </a:stretch>
+        </p:blipFill>
+        <p:spPr>
+          <a:xfrm>
+            <a:off x="2115052" y="2193925"/>
+            <a:ext cx="7961895" cy="4024313"/>
+          </a:xfrm>
+          <a:prstGeom prst="rect">
+            <a:avLst/>
+          </a:prstGeom>
+        </p:spPr>
+      </p:pic>
     </p:spTree>
     <p:extLst>
       <p:ext uri="{BB962C8B-B14F-4D97-AF65-F5344CB8AC3E}">
